--- a/slides/phase4_frontend.pptx
+++ b/slides/phase4_frontend.pptx
@@ -12385,8 +12385,8 @@
         </p:nvSpPr>
         <p:spPr>
           <a:xfrm>
-            <a:off x="4663440" y="2999232"/>
-            <a:ext cx="4023360" cy="603504"/>
+            <a:off x="4663440" y="2889504"/>
+            <a:ext cx="4023360" cy="914400"/>
           </a:xfrm>
           <a:prstGeom prst="rect">
             <a:avLst/>
@@ -12429,8 +12429,8 @@
         </p:nvSpPr>
         <p:spPr>
           <a:xfrm>
-            <a:off x="4791455" y="3090672"/>
-            <a:ext cx="3767328" cy="420624"/>
+            <a:off x="4791455" y="2980944"/>
+            <a:ext cx="3767328" cy="731520"/>
           </a:xfrm>
           <a:prstGeom prst="rect">
             <a:avLst/>
@@ -12452,7 +12452,7 @@
               </a:spcAft>
             </a:pPr>
             <a:r>
-              <a:rPr sz="1000" b="1">
+              <a:rPr sz="950" b="1">
                 <a:solidFill>
                   <a:srgbClr val="111827"/>
                 </a:solidFill>
@@ -12471,13 +12471,13 @@
               </a:spcAft>
             </a:pPr>
             <a:r>
-              <a:rPr sz="1000" b="0">
+              <a:rPr sz="950" b="0">
                 <a:solidFill>
                   <a:srgbClr val="111827"/>
                 </a:solidFill>
                 <a:latin typeface="Arial"/>
               </a:rPr>
-              <a:t>ページ（根）に付けると配下が全部クライアントになる。操作がある部品にだけ付ける。</a:t>
+              <a:t>ページ（根）に 'use client' を書くと配下が全部クライアントになる。ただし layout の中にクライアント部品を「置く」のは別。その部品だけがクライアントで、children はサーバーのまま。</a:t>
             </a:r>
           </a:p>
         </p:txBody>

--- a/slides/phase4_frontend.pptx
+++ b/slides/phase4_frontend.pptx
@@ -515,9 +515,74 @@
           <a:lstStyle/>
           <a:p>
             <a:r>
-              <a:t>自己紹介と範囲の確認。Phase 3 で API までできている前提。今日は「実装前に何を決めたか」を話す。</a:t>
-            </a:r>
-          </a:p>
+              <a:t>【1分30秒】導入</a:t>
+            </a:r>
+          </a:p>
+          <a:p/>
+          <a:p>
+            <a:r>
+              <a:t>◆ 名乗り</a:t>
+            </a:r>
+          </a:p>
+          <a:p>
+            <a:r>
+              <a:t>・Phase 4 の前半、フロントエンドと API 接続を担当します</a:t>
+            </a:r>
+          </a:p>
+          <a:p/>
+          <a:p>
+            <a:r>
+              <a:t>◆ 今日の立ち位置を図で示す</a:t>
+            </a:r>
+          </a:p>
+          <a:p>
+            <a:r>
+              <a:t>・下の帯を指す：ブラウザ → Next.js → FastAPI → PostgreSQL</a:t>
+            </a:r>
+          </a:p>
+          <a:p>
+            <a:r>
+              <a:t>・右の3つは前回まで（Phase 2 で DB、Phase 3 で API）</a:t>
+            </a:r>
+          </a:p>
+          <a:p>
+            <a:r>
+              <a:t>・今日はその左端、Next.js を足す話</a:t>
+            </a:r>
+          </a:p>
+          <a:p/>
+          <a:p>
+            <a:r>
+              <a:t>◆ 今日話すこと・話さないこと</a:t>
+            </a:r>
+          </a:p>
+          <a:p>
+            <a:r>
+              <a:t>・話す：実装の前に何を決めたか、決めた通りに動いたか</a:t>
+            </a:r>
+          </a:p>
+          <a:p>
+            <a:r>
+              <a:t>・話さない：Next.js の全機能。1画面作るのに必要な判断だけ</a:t>
+            </a:r>
+          </a:p>
+          <a:p>
+            <a:r>
+              <a:t>・結果として3画面を作ったので、机上の話ではなく実際に測った数字を出します</a:t>
+            </a:r>
+          </a:p>
+          <a:p/>
+          <a:p>
+            <a:r>
+              <a:t>◆ 一言添える</a:t>
+            </a:r>
+          </a:p>
+          <a:p>
+            <a:r>
+              <a:t>・先に言っておくと、途中で一度つまずいています。そこが今日の山場（S9）</a:t>
+            </a:r>
+          </a:p>
+          <a:p/>
         </p:txBody>
       </p:sp>
       <p:sp>
@@ -585,9 +650,115 @@
           <a:lstStyle/>
           <a:p>
             <a:r>
-              <a:t>使用頻度を書き出すまで気づかなかった。設計時は全部必要に見えていた。なお、これは「どのページを作るか」の話で、コンポーネントの粒度（Feature-based など）は後半のテーマだと一言添える。</a:t>
-            </a:r>
-          </a:p>
+              <a:t>【2分】画面：なぜ・困る時</a:t>
+            </a:r>
+          </a:p>
+          <a:p/>
+          <a:p>
+            <a:r>
+              <a:t>◆ 最初に範囲を断る</a:t>
+            </a:r>
+          </a:p>
+          <a:p>
+            <a:r>
+              <a:t>・ここは「どのページを作るか」の話</a:t>
+            </a:r>
+          </a:p>
+          <a:p>
+            <a:r>
+              <a:t>・コンポーネントをどう分けるか（Feature-based など）は Phase 4 後半のテーマ</a:t>
+            </a:r>
+          </a:p>
+          <a:p/>
+          <a:p>
+            <a:r>
+              <a:t>◆ 経緯</a:t>
+            </a:r>
+          </a:p>
+          <a:p>
+            <a:r>
+              <a:t>・設計フェーズでモックを7枚作った</a:t>
+            </a:r>
+          </a:p>
+          <a:p>
+            <a:r>
+              <a:t>・実装量を見積もったら 12〜16 時間だった</a:t>
+            </a:r>
+          </a:p>
+          <a:p>
+            <a:r>
+              <a:t>・多いと思って、使用頻度を書き出してみた</a:t>
+            </a:r>
+          </a:p>
+          <a:p/>
+          <a:p>
+            <a:r>
+              <a:t>◆ 表の真ん中の列を指す</a:t>
+            </a:r>
+          </a:p>
+          <a:p>
+            <a:r>
+              <a:t>・ダッシュボード：毎日</a:t>
+            </a:r>
+          </a:p>
+          <a:p>
+            <a:r>
+              <a:t>・支出一覧：週1〜月1</a:t>
+            </a:r>
+          </a:p>
+          <a:p>
+            <a:r>
+              <a:t>・月次清算：月1</a:t>
+            </a:r>
+          </a:p>
+          <a:p>
+            <a:r>
+              <a:t>・PayPay 取り込み：週1〜月1</a:t>
+            </a:r>
+          </a:p>
+          <a:p>
+            <a:r>
+              <a:t>・カテゴリ管理：年に数回</a:t>
+            </a:r>
+          </a:p>
+          <a:p>
+            <a:r>
+              <a:t>・アカウントメニュー：ほぼ使わない</a:t>
+            </a:r>
+          </a:p>
+          <a:p/>
+          <a:p>
+            <a:r>
+              <a:t>◆ 気づき</a:t>
+            </a:r>
+          </a:p>
+          <a:p>
+            <a:r>
+              <a:t>・半分は年に数回しか使わない画面だった</a:t>
+            </a:r>
+          </a:p>
+          <a:p>
+            <a:r>
+              <a:t>・設計しているときは全部必要に見えていた</a:t>
+            </a:r>
+          </a:p>
+          <a:p>
+            <a:r>
+              <a:t>・使用頻度を書き出すまで気づかなかった</a:t>
+            </a:r>
+          </a:p>
+          <a:p/>
+          <a:p>
+            <a:r>
+              <a:t>◆ 問題提起</a:t>
+            </a:r>
+          </a:p>
+          <a:p>
+            <a:r>
+              <a:t>・作る前に「作らないもの」を決めないと、使われない画面に時間を使う</a:t>
+            </a:r>
+          </a:p>
+          <a:p/>
         </p:txBody>
       </p:sp>
       <p:sp>
@@ -655,9 +826,100 @@
           <a:lstStyle/>
           <a:p>
             <a:r>
-              <a:t>YAGNI の実践。判断を3問に落とす。</a:t>
-            </a:r>
-          </a:p>
+              <a:t>【1分30秒】画面：どう対応するか</a:t>
+            </a:r>
+          </a:p>
+          <a:p/>
+          <a:p>
+            <a:r>
+              <a:t>◆ 3問を読み上げる</a:t>
+            </a:r>
+          </a:p>
+          <a:p>
+            <a:r>
+              <a:t>・その画面を週1回以上使うか</a:t>
+            </a:r>
+          </a:p>
+          <a:p>
+            <a:r>
+              <a:t>・他の画面に入れられないか</a:t>
+            </a:r>
+          </a:p>
+          <a:p>
+            <a:r>
+              <a:t>・その画面が無いと運用が止まるか</a:t>
+            </a:r>
+          </a:p>
+          <a:p/>
+          <a:p>
+            <a:r>
+              <a:t>◆ 表の使い方</a:t>
+            </a:r>
+          </a:p>
+          <a:p>
+            <a:r>
+              <a:t>・No が多いほど、独立した画面にする必要がない</a:t>
+            </a:r>
+          </a:p>
+          <a:p>
+            <a:r>
+              <a:t>・No が3つなら作らない</a:t>
+            </a:r>
+          </a:p>
+          <a:p/>
+          <a:p>
+            <a:r>
+              <a:t>◆ ここが一番大事（中央のボックス）</a:t>
+            </a:r>
+          </a:p>
+          <a:p>
+            <a:r>
+              <a:t>・機能を消すのではなく、画面を作らない</a:t>
+            </a:r>
+          </a:p>
+          <a:p>
+            <a:r>
+              <a:t>・API とカラムは残したまま、UI だけ作らない</a:t>
+            </a:r>
+          </a:p>
+          <a:p>
+            <a:r>
+              <a:t>・必要になったら画面を足すだけで済む</a:t>
+            </a:r>
+          </a:p>
+          <a:p/>
+          <a:p>
+            <a:r>
+              <a:t>◆ 自分の例で補足</a:t>
+            </a:r>
+          </a:p>
+          <a:p>
+            <a:r>
+              <a:t>・カテゴリの API は Phase 3 で4本作ってある</a:t>
+            </a:r>
+          </a:p>
+          <a:p>
+            <a:r>
+              <a:t>・is_archived カラムもある</a:t>
+            </a:r>
+          </a:p>
+          <a:p>
+            <a:r>
+              <a:t>・でも管理画面は作らなかった。追加は入力欄の「+ 新規」で足りる</a:t>
+            </a:r>
+          </a:p>
+          <a:p/>
+          <a:p>
+            <a:r>
+              <a:t>◆ 今日の一手</a:t>
+            </a:r>
+          </a:p>
+          <a:p>
+            <a:r>
+              <a:t>・自分のモックで、使用頻度が一番低い画面を1つ挙げる</a:t>
+            </a:r>
+          </a:p>
+          <a:p/>
         </p:txBody>
       </p:sp>
       <p:sp>
@@ -725,9 +987,120 @@
           <a:lstStyle/>
           <a:p>
             <a:r>
-              <a:t>モックの作り直しは代償として正直に話す。ただ実装前に気づけたので手戻りは小さかった。</a:t>
-            </a:r>
-          </a:p>
+              <a:t>【2分】画面：実例</a:t>
+            </a:r>
+          </a:p>
+          <a:p/>
+          <a:p>
+            <a:r>
+              <a:t>◆ 表を上から</a:t>
+            </a:r>
+          </a:p>
+          <a:p>
+            <a:r>
+              <a:t>・ダッシュボード → 残す（ホームに改称）</a:t>
+            </a:r>
+          </a:p>
+          <a:p>
+            <a:r>
+              <a:t>・支出一覧 → ホームに統合</a:t>
+            </a:r>
+          </a:p>
+          <a:p>
+            <a:r>
+              <a:t>・月次清算、PayPay 取り込み → 残す（核心機能）</a:t>
+            </a:r>
+          </a:p>
+          <a:p>
+            <a:r>
+              <a:t>・カテゴリ管理 → 廃止</a:t>
+            </a:r>
+          </a:p>
+          <a:p>
+            <a:r>
+              <a:t>・ログイン → Phase 5 に送る（認証が前提なので）</a:t>
+            </a:r>
+          </a:p>
+          <a:p>
+            <a:r>
+              <a:t>・アカウントメニュー → 廃止</a:t>
+            </a:r>
+          </a:p>
+          <a:p/>
+          <a:p>
+            <a:r>
+              <a:t>◆ 廃止した機能の行き先（左下）</a:t>
+            </a:r>
+          </a:p>
+          <a:p>
+            <a:r>
+              <a:t>・消したのではなく、置き場所を変えただけだと伝える</a:t>
+            </a:r>
+          </a:p>
+          <a:p>
+            <a:r>
+              <a:t>・支出一覧 → ホーム下部。編集は行内で直接</a:t>
+            </a:r>
+          </a:p>
+          <a:p>
+            <a:r>
+              <a:t>・カテゴリ追加 → 入力欄の「+ 新規」</a:t>
+            </a:r>
+          </a:p>
+          <a:p>
+            <a:r>
+              <a:t>・並び替え・アーカイブ → 作らない（API は残っている）</a:t>
+            </a:r>
+          </a:p>
+          <a:p/>
+          <a:p>
+            <a:r>
+              <a:t>◆ 得たもの</a:t>
+            </a:r>
+          </a:p>
+          <a:p>
+            <a:r>
+              <a:t>・実装が概ね半分になった</a:t>
+            </a:r>
+          </a:p>
+          <a:p>
+            <a:r>
+              <a:t>・Phase 5（認証）に早く進める</a:t>
+            </a:r>
+          </a:p>
+          <a:p/>
+          <a:p>
+            <a:r>
+              <a:t>◆ 代償も正直に話す</a:t>
+            </a:r>
+          </a:p>
+          <a:p>
+            <a:r>
+              <a:t>・カテゴリの並び替えが UI からできない</a:t>
+            </a:r>
+          </a:p>
+          <a:p>
+            <a:r>
+              <a:t>・モックを作り直す手間が発生した。PC 版とスマホ版で6枚</a:t>
+            </a:r>
+          </a:p>
+          <a:p>
+            <a:r>
+              <a:t>・ただ、実装前に気づけたので手戻りは小さかった</a:t>
+            </a:r>
+          </a:p>
+          <a:p/>
+          <a:p>
+            <a:r>
+              <a:t>◆ 結論</a:t>
+            </a:r>
+          </a:p>
+          <a:p>
+            <a:r>
+              <a:t>・使用頻度で切る。API を残しておけば後から画面を足せる</a:t>
+            </a:r>
+          </a:p>
+          <a:p/>
         </p:txBody>
       </p:sp>
       <p:sp>
@@ -795,9 +1168,95 @@
           <a:lstStyle/>
           <a:p>
             <a:r>
-              <a:t>3分ほど時間を取る。第五回と同じ形式。</a:t>
-            </a:r>
-          </a:p>
+              <a:t>【3分】ワーク</a:t>
+            </a:r>
+          </a:p>
+          <a:p/>
+          <a:p>
+            <a:r>
+              <a:t>◆ 進め方を先に言う</a:t>
+            </a:r>
+          </a:p>
+          <a:p>
+            <a:r>
+              <a:t>・3分取ります。手元のモックかコードを開いてください</a:t>
+            </a:r>
+          </a:p>
+          <a:p>
+            <a:r>
+              <a:t>・3つを1行ずつ書く。書けたら1つだけ共有してもらいます（パスも可）</a:t>
+            </a:r>
+          </a:p>
+          <a:p/>
+          <a:p>
+            <a:r>
+              <a:t>◆ 3問を読み上げる</a:t>
+            </a:r>
+          </a:p>
+          <a:p>
+            <a:r>
+              <a:t>・境界：最初に作る画面で 'use client' が必要な部品を1つ挙げる</a:t>
+            </a:r>
+          </a:p>
+          <a:p>
+            <a:r>
+              <a:t>・接続：更新後に画面を更新する手段を決めたか。使う関数名を1つ書く</a:t>
+            </a:r>
+          </a:p>
+          <a:p>
+            <a:r>
+              <a:t>・画面：作らないと決めた画面はあるか。1つ挙げる。無ければ「なし」</a:t>
+            </a:r>
+          </a:p>
+          <a:p/>
+          <a:p>
+            <a:r>
+              <a:t>◆ まだコードがない人へ（右下）</a:t>
+            </a:r>
+          </a:p>
+          <a:p>
+            <a:r>
+              <a:t>・紙に書くだけでいい</a:t>
+            </a:r>
+          </a:p>
+          <a:p>
+            <a:r>
+              <a:t>・作る予定の画面で、どこをクライアントにするか／どう更新するか／作らない画面はどれか</a:t>
+            </a:r>
+          </a:p>
+          <a:p/>
+          <a:p>
+            <a:r>
+              <a:t>◆ 時間を計る</a:t>
+            </a:r>
+          </a:p>
+          <a:p>
+            <a:r>
+              <a:t>・3分経ったら声をかける</a:t>
+            </a:r>
+          </a:p>
+          <a:p>
+            <a:r>
+              <a:t>・巡回して詰まっている人がいたら、自分の例を出して助ける</a:t>
+            </a:r>
+          </a:p>
+          <a:p>
+            <a:r>
+              <a:t>  例：自分は「入力フォーム」「refresh()」「カテゴリ管理画面」と書いた</a:t>
+            </a:r>
+          </a:p>
+          <a:p/>
+          <a:p>
+            <a:r>
+              <a:t>◆ 共有のとき</a:t>
+            </a:r>
+          </a:p>
+          <a:p>
+            <a:r>
+              <a:t>・1人1つでいい。全員に当てない</a:t>
+            </a:r>
+          </a:p>
+          <a:p/>
         </p:txBody>
       </p:sp>
       <p:sp>
@@ -865,9 +1324,125 @@
           <a:lstStyle/>
           <a:p>
             <a:r>
-              <a:t>3つ全部やらせないのが大事。1つに絞る。</a:t>
-            </a:r>
-          </a:p>
+              <a:t>【1分30秒】まとめ</a:t>
+            </a:r>
+          </a:p>
+          <a:p/>
+          <a:p>
+            <a:r>
+              <a:t>◆ 3つを振り返る</a:t>
+            </a:r>
+          </a:p>
+          <a:p>
+            <a:r>
+              <a:t>・境界：既定はサーバー。操作がある部品だけ 'use client'</a:t>
+            </a:r>
+          </a:p>
+          <a:p>
+            <a:r>
+              <a:t>・接続：表示は await、変更は Server Actions。更新後に refresh()</a:t>
+            </a:r>
+          </a:p>
+          <a:p>
+            <a:r>
+              <a:t>・画面：使用頻度が低い画面は作らない。API は残しておく</a:t>
+            </a:r>
+          </a:p>
+          <a:p/>
+          <a:p>
+            <a:r>
+              <a:t>◆ ここを強調する</a:t>
+            </a:r>
+          </a:p>
+          <a:p>
+            <a:r>
+              <a:t>・3つ全部やろうとしないでほしい</a:t>
+            </a:r>
+          </a:p>
+          <a:p>
+            <a:r>
+              <a:t>・決めた1つだけ、明日やる</a:t>
+            </a:r>
+          </a:p>
+          <a:p/>
+          <a:p>
+            <a:r>
+              <a:t>◆ 副産物</a:t>
+            </a:r>
+          </a:p>
+          <a:p>
+            <a:r>
+              <a:t>・バージョンを確認して公式を読む。記事は補助に使う</a:t>
+            </a:r>
+          </a:p>
+          <a:p>
+            <a:r>
+              <a:t>・Next.js 以外でも効く話だと思う</a:t>
+            </a:r>
+          </a:p>
+          <a:p/>
+          <a:p>
+            <a:r>
+              <a:t>◆ 締め</a:t>
+            </a:r>
+          </a:p>
+          <a:p>
+            <a:r>
+              <a:t>・次回は Phase 4 後半、コンポーネント設計と UI ライブラリ</a:t>
+            </a:r>
+          </a:p>
+          <a:p>
+            <a:r>
+              <a:t>・質問があれば</a:t>
+            </a:r>
+          </a:p>
+          <a:p/>
+          <a:p>
+            <a:r>
+              <a:t>◆ 想定質問への備え</a:t>
+            </a:r>
+          </a:p>
+          <a:p>
+            <a:r>
+              <a:t>・「shadcn/ui は使わないのか」</a:t>
+            </a:r>
+          </a:p>
+          <a:p>
+            <a:r>
+              <a:t>  → 今回は入れなかった。3画面で汎用部品が出てこなかったから。後半のテーマ</a:t>
+            </a:r>
+          </a:p>
+          <a:p>
+            <a:r>
+              <a:t>・「型は生成しないのか」</a:t>
+            </a:r>
+          </a:p>
+          <a:p>
+            <a:r>
+              <a:t>  → OpenAPI からの生成も検討したが、型が10個程度だったので手書きにした</a:t>
+            </a:r>
+          </a:p>
+          <a:p>
+            <a:r>
+              <a:t>・「なぜ Server Actions？普通に fetch ではだめ？」</a:t>
+            </a:r>
+          </a:p>
+          <a:p>
+            <a:r>
+              <a:t>  → S8 の3つの理由。特に Phase 5 の Cookie 認証を見据えて</a:t>
+            </a:r>
+          </a:p>
+          <a:p>
+            <a:r>
+              <a:t>・「エラーはどう出している？」</a:t>
+            </a:r>
+          </a:p>
+          <a:p>
+            <a:r>
+              <a:t>  → 422 は detail[].loc[1] を見て該当フィールドの下に日本語で出している</a:t>
+            </a:r>
+          </a:p>
+          <a:p/>
         </p:txBody>
       </p:sp>
       <p:sp>
@@ -935,9 +1510,84 @@
           <a:lstStyle/>
           <a:p>
             <a:r>
-              <a:t>第五回と同じ形式。3テーマそれぞれを「なぜ・困る時 → どう対応 → 実例」で回す。</a:t>
-            </a:r>
-          </a:p>
+              <a:t>【1分30秒】全体像</a:t>
+            </a:r>
+          </a:p>
+          <a:p/>
+          <a:p>
+            <a:r>
+              <a:t>◆ 3テーマを読み上げる</a:t>
+            </a:r>
+          </a:p>
+          <a:p>
+            <a:r>
+              <a:t>・境界＝処理をどこで動かすか</a:t>
+            </a:r>
+          </a:p>
+          <a:p>
+            <a:r>
+              <a:t>・接続＝API をどう呼ぶか</a:t>
+            </a:r>
+          </a:p>
+          <a:p>
+            <a:r>
+              <a:t>・画面＝機能をどこまで作るか</a:t>
+            </a:r>
+          </a:p>
+          <a:p/>
+          <a:p>
+            <a:r>
+              <a:t>◆ 右の列（困る時）を強調する</a:t>
+            </a:r>
+          </a:p>
+          <a:p>
+            <a:r>
+              <a:t>・この3つは、どれも自分が実際に困った／困りかけたこと</a:t>
+            </a:r>
+          </a:p>
+          <a:p>
+            <a:r>
+              <a:t>・「ページ全体が重くなる」「登録したのに一覧が古いまま」</a:t>
+            </a:r>
+          </a:p>
+          <a:p>
+            <a:r>
+              <a:t>・「モックを7枚作ったが半分は年に数回しか使わない」</a:t>
+            </a:r>
+          </a:p>
+          <a:p/>
+          <a:p>
+            <a:r>
+              <a:t>◆ 形式の予告</a:t>
+            </a:r>
+          </a:p>
+          <a:p>
+            <a:r>
+              <a:t>・各テーマ3枚ずつ。なぜ・困る時 → どう対応 → 実例</a:t>
+            </a:r>
+          </a:p>
+          <a:p>
+            <a:r>
+              <a:t>・前回（第五回）と同じ形式にしています</a:t>
+            </a:r>
+          </a:p>
+          <a:p/>
+          <a:p>
+            <a:r>
+              <a:t>◆ ゴールの確認</a:t>
+            </a:r>
+          </a:p>
+          <a:p>
+            <a:r>
+              <a:t>・学ぶのは機能ではなく判断</a:t>
+            </a:r>
+          </a:p>
+          <a:p>
+            <a:r>
+              <a:t>・最後に、自分のアプリで決めることを3つ書き出す時間を取ります</a:t>
+            </a:r>
+          </a:p>
+          <a:p/>
         </p:txBody>
       </p:sp>
       <p:sp>
@@ -1005,9 +1655,105 @@
           <a:lstStyle/>
           <a:p>
             <a:r>
-              <a:t>Phase 3 の S5「FastAPI はどこにいるか」の対応版。層が1つ増えただけ、と伝える。</a:t>
-            </a:r>
-          </a:p>
+              <a:t>【3分】Next.js はどこにいるか</a:t>
+            </a:r>
+          </a:p>
+          <a:p/>
+          <a:p>
+            <a:r>
+              <a:t>◆ 4層の図を上から順に</a:t>
+            </a:r>
+          </a:p>
+          <a:p>
+            <a:r>
+              <a:t>・ブラウザ＝画面を見て操作する</a:t>
+            </a:r>
+          </a:p>
+          <a:p>
+            <a:r>
+              <a:t>・Next.js＝画面を組み立てる。HTTP の入口</a:t>
+            </a:r>
+          </a:p>
+          <a:p>
+            <a:r>
+              <a:t>・FastAPI＝Phase 3 で作った API</a:t>
+            </a:r>
+          </a:p>
+          <a:p>
+            <a:r>
+              <a:t>・PostgreSQL＝Phase 2 で作った DB</a:t>
+            </a:r>
+          </a:p>
+          <a:p/>
+          <a:p>
+            <a:r>
+              <a:t>◆ ここが最初の発見</a:t>
+            </a:r>
+          </a:p>
+          <a:p>
+            <a:r>
+              <a:t>・Next.js を「フロントを作るツール」だと思っていた</a:t>
+            </a:r>
+          </a:p>
+          <a:p>
+            <a:r>
+              <a:t>・実際はサーバーとしても動く。Node のプロセスが立つ</a:t>
+            </a:r>
+          </a:p>
+          <a:p>
+            <a:r>
+              <a:t>・npm run dev すると localhost:3000 でサーバーが起動している</a:t>
+            </a:r>
+          </a:p>
+          <a:p/>
+          <a:p>
+            <a:r>
+              <a:t>◆ だから経路が2つできる</a:t>
+            </a:r>
+          </a:p>
+          <a:p>
+            <a:r>
+              <a:t>・(1) ブラウザ → Next.js（サーバー）→ FastAPI</a:t>
+            </a:r>
+          </a:p>
+          <a:p>
+            <a:r>
+              <a:t>・(2) ブラウザ → FastAPI に直接</a:t>
+            </a:r>
+          </a:p>
+          <a:p>
+            <a:r>
+              <a:t>・どちらを選ぶかで、書き方も、ブラウザから見える情報も変わる</a:t>
+            </a:r>
+          </a:p>
+          <a:p/>
+          <a:p>
+            <a:r>
+              <a:t>◆ 今日の1つ目のテーマにつなぐ</a:t>
+            </a:r>
+          </a:p>
+          <a:p>
+            <a:r>
+              <a:t>・この「どちらで動かすか」が、次の「境界」の話</a:t>
+            </a:r>
+          </a:p>
+          <a:p/>
+          <a:p>
+            <a:r>
+              <a:t>◆ 補足（聞かれたら）</a:t>
+            </a:r>
+          </a:p>
+          <a:p>
+            <a:r>
+              <a:t>・小さいアプリなら経路は1つでいい。分ける理由があるときだけ分ける</a:t>
+            </a:r>
+          </a:p>
+          <a:p>
+            <a:r>
+              <a:t>・自分は(1)に統一した。理由は S8 で話します</a:t>
+            </a:r>
+          </a:p>
+          <a:p/>
         </p:txBody>
       </p:sp>
       <p:sp>
@@ -1075,9 +1821,105 @@
           <a:lstStyle/>
           <a:p>
             <a:r>
-              <a:t>「サーバーコンポーネント」は名前が紛らわしい。サーバーでしか動かないのではなく、ブラウザに JS を送らないのが本質。</a:t>
-            </a:r>
-          </a:p>
+              <a:t>【2分】境界：なぜ・困る時</a:t>
+            </a:r>
+          </a:p>
+          <a:p/>
+          <a:p>
+            <a:r>
+              <a:t>◆ 表を読む前に一言</a:t>
+            </a:r>
+          </a:p>
+          <a:p>
+            <a:r>
+              <a:t>・「サーバーコンポーネント」は名前が紛らわしいと思っている</a:t>
+            </a:r>
+          </a:p>
+          <a:p>
+            <a:r>
+              <a:t>・サーバーでしか動かない、という意味ではない</a:t>
+            </a:r>
+          </a:p>
+          <a:p>
+            <a:r>
+              <a:t>・本質は右の列＝ブラウザに JavaScript を送るかどうか</a:t>
+            </a:r>
+          </a:p>
+          <a:p/>
+          <a:p>
+            <a:r>
+              <a:t>◆ 表の右列を指す</a:t>
+            </a:r>
+          </a:p>
+          <a:p>
+            <a:r>
+              <a:t>・サーバー：送らない。HTML を組み立ててから渡す</a:t>
+            </a:r>
+          </a:p>
+          <a:p>
+            <a:r>
+              <a:t>・クライアント：送る。ブラウザ上で JS が動いて描画する</a:t>
+            </a:r>
+          </a:p>
+          <a:p/>
+          <a:p>
+            <a:r>
+              <a:t>◆ 既定はサーバー</a:t>
+            </a:r>
+          </a:p>
+          <a:p>
+            <a:r>
+              <a:t>・何も書かなければサーバー</a:t>
+            </a:r>
+          </a:p>
+          <a:p>
+            <a:r>
+              <a:t>・'use client' と書いた時だけクライアントになる</a:t>
+            </a:r>
+          </a:p>
+          <a:p>
+            <a:r>
+              <a:t>・この1行で、ブラウザに送るものが変わる</a:t>
+            </a:r>
+          </a:p>
+          <a:p/>
+          <a:p>
+            <a:r>
+              <a:t>◆ 困る例（右下のコード）</a:t>
+            </a:r>
+          </a:p>
+          <a:p>
+            <a:r>
+              <a:t>・ページの先頭に 'use client' を書いてしまった場合</a:t>
+            </a:r>
+          </a:p>
+          <a:p>
+            <a:r>
+              <a:t>・配下のコンポーネントが全部クライアント扱いになる</a:t>
+            </a:r>
+          </a:p>
+          <a:p>
+            <a:r>
+              <a:t>・支出42件の一覧も、ブラウザ側で組み立てることになる</a:t>
+            </a:r>
+          </a:p>
+          <a:p>
+            <a:r>
+              <a:t>・表示までに往復が増えて、一瞬「空っぽの画面」が見える</a:t>
+            </a:r>
+          </a:p>
+          <a:p/>
+          <a:p>
+            <a:r>
+              <a:t>◆ つなぎ</a:t>
+            </a:r>
+          </a:p>
+          <a:p>
+            <a:r>
+              <a:t>・ではどこに書けばいいのか、が次の1枚</a:t>
+            </a:r>
+          </a:p>
+          <a:p/>
         </p:txBody>
       </p:sp>
       <p:sp>
@@ -1145,9 +1987,110 @@
           <a:lstStyle/>
           <a:p>
             <a:r>
-              <a:t>判断基準を1問に絞るのがポイント。</a:t>
-            </a:r>
-          </a:p>
+              <a:t>【2分】境界：どう対応するか</a:t>
+            </a:r>
+          </a:p>
+          <a:p/>
+          <a:p>
+            <a:r>
+              <a:t>◆ 判断は1問だけ、と言い切る</a:t>
+            </a:r>
+          </a:p>
+          <a:p>
+            <a:r>
+              <a:t>・「ブラウザでしか出来ないことを使うか？」</a:t>
+            </a:r>
+          </a:p>
+          <a:p>
+            <a:r>
+              <a:t>・Yes ならクライアント、No ならサーバー（＝何も書かない）</a:t>
+            </a:r>
+          </a:p>
+          <a:p/>
+          <a:p>
+            <a:r>
+              <a:t>◆ 左のリストを読む</a:t>
+            </a:r>
+          </a:p>
+          <a:p>
+            <a:r>
+              <a:t>・onClick / onChange / onSubmit ＝ 操作への反応</a:t>
+            </a:r>
+          </a:p>
+          <a:p>
+            <a:r>
+              <a:t>・useState ＝ 状態を持つ</a:t>
+            </a:r>
+          </a:p>
+          <a:p>
+            <a:r>
+              <a:t>・useEffect ＝ 副作用</a:t>
+            </a:r>
+          </a:p>
+          <a:p>
+            <a:r>
+              <a:t>・localStorage / window / document</a:t>
+            </a:r>
+          </a:p>
+          <a:p/>
+          <a:p>
+            <a:r>
+              <a:t>◆ 原則（右下のボックス）</a:t>
+            </a:r>
+          </a:p>
+          <a:p>
+            <a:r>
+              <a:t>・'use client' は葉に付ける。根に付けない</a:t>
+            </a:r>
+          </a:p>
+          <a:p>
+            <a:r>
+              <a:t>・根に付けると配下が全部クライアントになる（S4 の失敗パターン）</a:t>
+            </a:r>
+          </a:p>
+          <a:p/>
+          <a:p>
+            <a:r>
+              <a:t>◆ ここは混同しやすいので丁寧に</a:t>
+            </a:r>
+          </a:p>
+          <a:p>
+            <a:r>
+              <a:t>・「layout にクライアント部品を置く」のは、根に 'use client' を書くのとは別</a:t>
+            </a:r>
+          </a:p>
+          <a:p>
+            <a:r>
+              <a:t>・自分のアプリのナビがまさにこれ</a:t>
+            </a:r>
+          </a:p>
+          <a:p>
+            <a:r>
+              <a:t>・ナビは現在地で色を変えるので usePathname が要る → クライアント</a:t>
+            </a:r>
+          </a:p>
+          <a:p>
+            <a:r>
+              <a:t>・でも layout に置いても、children の3画面はサーバーのまま</a:t>
+            </a:r>
+          </a:p>
+          <a:p>
+            <a:r>
+              <a:t>・つまり影響するのは「その部品自身」だけ</a:t>
+            </a:r>
+          </a:p>
+          <a:p/>
+          <a:p>
+            <a:r>
+              <a:t>◆ 今日の一手</a:t>
+            </a:r>
+          </a:p>
+          <a:p>
+            <a:r>
+              <a:t>・最初に作る画面で、クライアントが必要な部品を1つだけ決める</a:t>
+            </a:r>
+          </a:p>
+          <a:p/>
         </p:txBody>
       </p:sp>
       <p:sp>
@@ -1215,9 +2158,110 @@
           <a:lstStyle/>
           <a:p>
             <a:r>
-              <a:t>curl でサーバーの HTML を見せると一発で伝わる。ブラウザの Network タブを開いても API 通信が1件も出ない、というのが S4 で言った「JS を送らない」の実物。</a:t>
-            </a:r>
-          </a:p>
+              <a:t>【2分30秒】境界：実例</a:t>
+            </a:r>
+          </a:p>
+          <a:p/>
+          <a:p>
+            <a:r>
+              <a:t>◆ 上の表：3画面の振り分け</a:t>
+            </a:r>
+          </a:p>
+          <a:p>
+            <a:r>
+              <a:t>・左がサーバー、右がクライアント</a:t>
+            </a:r>
+          </a:p>
+          <a:p>
+            <a:r>
+              <a:t>・注目してほしいのは、行が「画面」なのに中身は「部品」で分かれていること</a:t>
+            </a:r>
+          </a:p>
+          <a:p>
+            <a:r>
+              <a:t>・画面単位ではなく部品単位で決めた</a:t>
+            </a:r>
+          </a:p>
+          <a:p/>
+          <a:p>
+            <a:r>
+              <a:t>◆ 意外だった2つ（聞かれなくても話す）</a:t>
+            </a:r>
+          </a:p>
+          <a:p>
+            <a:r>
+              <a:t>・カテゴリ別グラフはサーバーのままにできた</a:t>
+            </a:r>
+          </a:p>
+          <a:p>
+            <a:r>
+              <a:t>  → ライブラリを使わず CSS の width % で棒を描いたので JS が要らなかった</a:t>
+            </a:r>
+          </a:p>
+          <a:p>
+            <a:r>
+              <a:t>・絞り込みと月の切り替えもサーバーのまま</a:t>
+            </a:r>
+          </a:p>
+          <a:p>
+            <a:r>
+              <a:t>  → useState ではなく URL に持たせた（/?category=1）ので &lt;Link&gt; の遷移で済む</a:t>
+            </a:r>
+          </a:p>
+          <a:p/>
+          <a:p>
+            <a:r>
+              <a:t>◆ 下の実測表</a:t>
+            </a:r>
+          </a:p>
+          <a:p>
+            <a:r>
+              <a:t>・ファイル数は サーバー17 / クライアント8</a:t>
+            </a:r>
+          </a:p>
+          <a:p>
+            <a:r>
+              <a:t>・ホーム画面を開いてブラウザが叩いた API は 0 件</a:t>
+            </a:r>
+          </a:p>
+          <a:p>
+            <a:r>
+              <a:t>・サーバーが返す HTML に「¥16,640」がそのまま入っている</a:t>
+            </a:r>
+          </a:p>
+          <a:p/>
+          <a:p>
+            <a:r>
+              <a:t>【実演】ここで curl の結果を見せる</a:t>
+            </a:r>
+          </a:p>
+          <a:p>
+            <a:r>
+              <a:t>・curl http://localhost:3000 | grep 16,640</a:t>
+            </a:r>
+          </a:p>
+          <a:p>
+            <a:r>
+              <a:t>・ブラウザの Network タブを開いても API 通信が1件も出ないことを見せてもいい</a:t>
+            </a:r>
+          </a:p>
+          <a:p>
+            <a:r>
+              <a:t>・これが S4 で言った「JS を送らない」の実物</a:t>
+            </a:r>
+          </a:p>
+          <a:p/>
+          <a:p>
+            <a:r>
+              <a:t>◆ 結論</a:t>
+            </a:r>
+          </a:p>
+          <a:p>
+            <a:r>
+              <a:t>・画面ではなく部品で決める。表示はサーバー、操作はクライアント</a:t>
+            </a:r>
+          </a:p>
+          <a:p/>
         </p:txBody>
       </p:sp>
       <p:sp>
@@ -1285,9 +2329,105 @@
           <a:lstStyle/>
           <a:p>
             <a:r>
-              <a:t>S9 への伏線。バージョン差の話につなげる。</a:t>
-            </a:r>
-          </a:p>
+              <a:t>【2分】接続：なぜ・困る時</a:t>
+            </a:r>
+          </a:p>
+          <a:p/>
+          <a:p>
+            <a:r>
+              <a:t>◆ 症状から入る</a:t>
+            </a:r>
+          </a:p>
+          <a:p>
+            <a:r>
+              <a:t>・支出を登録した。DB には入っている。psql で確認できる</a:t>
+            </a:r>
+          </a:p>
+          <a:p>
+            <a:r>
+              <a:t>・API も 201 を返している</a:t>
+            </a:r>
+          </a:p>
+          <a:p>
+            <a:r>
+              <a:t>・なのに画面の一覧が古いまま</a:t>
+            </a:r>
+          </a:p>
+          <a:p/>
+          <a:p>
+            <a:r>
+              <a:t>◆ 中央のコードを指す</a:t>
+            </a:r>
+          </a:p>
+          <a:p>
+            <a:r>
+              <a:t>・よくある書き方。fetch して json にする</a:t>
+            </a:r>
+          </a:p>
+          <a:p>
+            <a:r>
+              <a:t>・これだけでは、更新後に再取得されるとは限らない</a:t>
+            </a:r>
+          </a:p>
+          <a:p/>
+          <a:p>
+            <a:r>
+              <a:t>◆ 切り分けるべき4点（右のリスト）</a:t>
+            </a:r>
+          </a:p>
+          <a:p>
+            <a:r>
+              <a:t>・キャッシュされて古い結果が返っているのか</a:t>
+            </a:r>
+          </a:p>
+          <a:p>
+            <a:r>
+              <a:t>・再取得の指示を出していないだけなのか</a:t>
+            </a:r>
+          </a:p>
+          <a:p>
+            <a:r>
+              <a:t>・そもそも取得と更新で別の経路を使うべきなのか</a:t>
+            </a:r>
+          </a:p>
+          <a:p>
+            <a:r>
+              <a:t>・使っているバージョンで既定の動きが変わっていないか</a:t>
+            </a:r>
+          </a:p>
+          <a:p/>
+          <a:p>
+            <a:r>
+              <a:t>◆ 伏線を張る</a:t>
+            </a:r>
+          </a:p>
+          <a:p>
+            <a:r>
+              <a:t>・最後の1点が今日の山場。ここで自分は一度つまずいた</a:t>
+            </a:r>
+          </a:p>
+          <a:p>
+            <a:r>
+              <a:t>・その話は2枚あと（S9）でします</a:t>
+            </a:r>
+          </a:p>
+          <a:p/>
+          <a:p>
+            <a:r>
+              <a:t>◆ このテーマの立場</a:t>
+            </a:r>
+          </a:p>
+          <a:p>
+            <a:r>
+              <a:t>・取得と更新は別の問題として考える必要がある</a:t>
+            </a:r>
+          </a:p>
+          <a:p>
+            <a:r>
+              <a:t>・同じ fetch でも扱いが違う、というのが次の枚</a:t>
+            </a:r>
+          </a:p>
+          <a:p/>
         </p:txBody>
       </p:sp>
       <p:sp>
@@ -1355,9 +2495,126 @@
           <a:lstStyle/>
           <a:p>
             <a:r>
-              <a:t>経路を分けるのが結論。Server Actions は Phase 5 の認証にも効く。Server Actions を選んだ理由: API の URL がブラウザに出ない / CORS 設定が不要 / Phase 5 で Cookie を扱うとき有利。</a:t>
-            </a:r>
-          </a:p>
+              <a:t>【3分】接続：どう対応するか</a:t>
+            </a:r>
+          </a:p>
+          <a:p/>
+          <a:p>
+            <a:r>
+              <a:t>◆ 表：経路を分ける</a:t>
+            </a:r>
+          </a:p>
+          <a:p>
+            <a:r>
+              <a:t>・表示（GET）＝サーバーコンポーネント。async function にして直接 await</a:t>
+            </a:r>
+          </a:p>
+          <a:p>
+            <a:r>
+              <a:t>・変更（POST/PATCH/DELETE）＝Server Actions。'use server' を書いて、最後に refresh()</a:t>
+            </a:r>
+          </a:p>
+          <a:p/>
+          <a:p>
+            <a:r>
+              <a:t>◆ 左右のコードを対比して見せる</a:t>
+            </a:r>
+          </a:p>
+          <a:p>
+            <a:r>
+              <a:t>・左：Page が async。await apiGet して、その結果を渡すだけ</a:t>
+            </a:r>
+          </a:p>
+          <a:p>
+            <a:r>
+              <a:t>・右：'use server' の関数。fetch した後 refresh() を呼ぶ</a:t>
+            </a:r>
+          </a:p>
+          <a:p/>
+          <a:p>
+            <a:r>
+              <a:t>◆ Server Actions を選んだ理由（3つ。ここは自分の判断として話す）</a:t>
+            </a:r>
+          </a:p>
+          <a:p>
+            <a:r>
+              <a:t>・API の URL がブラウザに出ない。lib/api.ts に server-only を付けてある</a:t>
+            </a:r>
+          </a:p>
+          <a:p>
+            <a:r>
+              <a:t>・CORS の設定が要らない。ブラウザは Next.js しか叩かないから</a:t>
+            </a:r>
+          </a:p>
+          <a:p>
+            <a:r>
+              <a:t>・Phase 5 で JWT を HttpOnly Cookie に入れるとき、扱いがサーバー側で完結する</a:t>
+            </a:r>
+          </a:p>
+          <a:p/>
+          <a:p>
+            <a:r>
+              <a:t>◆ 下の実測表を読む</a:t>
+            </a:r>
+          </a:p>
+          <a:p>
+            <a:r>
+              <a:t>・支出を1件登録した前後。ページ遷移はしていない</a:t>
+            </a:r>
+          </a:p>
+          <a:p>
+            <a:r>
+              <a:t>・合計 ¥20,288 → ¥22,868、件数 9 → 10</a:t>
+            </a:r>
+          </a:p>
+          <a:p>
+            <a:r>
+              <a:t>・外食カテゴリ ¥2,800（1件）→ ¥5,380（2件）</a:t>
+            </a:r>
+          </a:p>
+          <a:p>
+            <a:r>
+              <a:t>・送金額 ¥1,896 → ¥3,186</a:t>
+            </a:r>
+          </a:p>
+          <a:p>
+            <a:r>
+              <a:t>・ブラウザの API 呼び出しは前後とも 0</a:t>
+            </a:r>
+          </a:p>
+          <a:p/>
+          <a:p>
+            <a:r>
+              <a:t>◆ ここが言いたいこと</a:t>
+            </a:r>
+          </a:p>
+          <a:p>
+            <a:r>
+              <a:t>・集計・グラフ・一覧・送金額が同時に更新されている</a:t>
+            </a:r>
+          </a:p>
+          <a:p>
+            <a:r>
+              <a:t>・個別に取り直すコードは1行も書いていない。refresh() 1行だけ</a:t>
+            </a:r>
+          </a:p>
+          <a:p/>
+          <a:p>
+            <a:r>
+              <a:t>【実演】余裕があれば実際に登録して見せる</a:t>
+            </a:r>
+          </a:p>
+          <a:p>
+            <a:r>
+              <a:t>・表の数字は測定したときの記録なので、その場で実演すると今の値から動きます</a:t>
+            </a:r>
+          </a:p>
+          <a:p>
+            <a:r>
+              <a:t>・見せ方：合計と件数を読み上げてから登録 → 数字が一斉に変わるのを指す</a:t>
+            </a:r>
+          </a:p>
+          <a:p/>
         </p:txBody>
       </p:sp>
       <p:sp>
@@ -1425,9 +2682,131 @@
           <a:lstStyle/>
           <a:p>
             <a:r>
-              <a:t>今日一番伝えたい話。動かないコードを書く前に気づけた。Next.js は 13→16 で作法が変わっている。AGENTS.md は next dev が自動生成するもので、フレームワーク側がバージョン差の問題を認識している証拠になる。やったこと: 公式でバージョン確認 → 記事は 13〜14 時代と判明 → 計画を書き直した。代償: 公式を読む時間、日本語記事が使えない場面、毎回バージョンを確認する手間。</a:t>
-            </a:r>
-          </a:p>
+              <a:t>【2分30秒】接続：実例（今日一番伝えたい話）</a:t>
+            </a:r>
+          </a:p>
+          <a:p/>
+          <a:p>
+            <a:r>
+              <a:t>◆ 何が起きたか</a:t>
+            </a:r>
+          </a:p>
+          <a:p>
+            <a:r>
+              <a:t>・検索で出てきた記事を見ながら書こうとした</a:t>
+            </a:r>
+          </a:p>
+          <a:p>
+            <a:r>
+              <a:t>・記事どうしで書き方が食い違っていた</a:t>
+            </a:r>
+          </a:p>
+          <a:p>
+            <a:r>
+              <a:t>・調べたら、バージョンで作法が変わっていた</a:t>
+            </a:r>
+          </a:p>
+          <a:p/>
+          <a:p>
+            <a:r>
+              <a:t>◆ 表を読む（左が記事、右が実際）</a:t>
+            </a:r>
+          </a:p>
+          <a:p>
+            <a:r>
+              <a:t>・fetch のキャッシュ：既定でキャッシュされる → されない</a:t>
+            </a:r>
+          </a:p>
+          <a:p>
+            <a:r>
+              <a:t>・キャッシュ回避：no-store を明示 → 不要</a:t>
+            </a:r>
+          </a:p>
+          <a:p>
+            <a:r>
+              <a:t>・更新後の反映：router.refresh() をクライアントで → refresh() を Server Action 内で</a:t>
+            </a:r>
+          </a:p>
+          <a:p>
+            <a:r>
+              <a:t>・変更処理：クライアントから fetch(POST) → Server Actions</a:t>
+            </a:r>
+          </a:p>
+          <a:p/>
+          <a:p>
+            <a:r>
+              <a:t>◆ 決め手になったもの（右のコード）</a:t>
+            </a:r>
+          </a:p>
+          <a:p>
+            <a:r>
+              <a:t>・npm run dev したら AGENTS.md というファイルが勝手に生成されていた</a:t>
+            </a:r>
+          </a:p>
+          <a:p>
+            <a:r>
+              <a:t>・中身を読む：「This is NOT the Next.js you know」</a:t>
+            </a:r>
+          </a:p>
+          <a:p>
+            <a:r>
+              <a:t>・「訓練データと違うかもしれない。node_modules の中のドキュメントを読め」</a:t>
+            </a:r>
+          </a:p>
+          <a:p>
+            <a:r>
+              <a:t>・フレームワーク自身がバージョン差の問題を認めている</a:t>
+            </a:r>
+          </a:p>
+          <a:p/>
+          <a:p>
+            <a:r>
+              <a:t>【実演】実物を見せる</a:t>
+            </a:r>
+          </a:p>
+          <a:p>
+            <a:r>
+              <a:t>・cat frontend/AGENTS.md</a:t>
+            </a:r>
+          </a:p>
+          <a:p/>
+          <a:p>
+            <a:r>
+              <a:t>◆ 読んだ結果わかったこと</a:t>
+            </a:r>
+          </a:p>
+          <a:p>
+            <a:r>
+              <a:t>・ドキュメントが node_modules に同梱されている</a:t>
+            </a:r>
+          </a:p>
+          <a:p>
+            <a:r>
+              <a:t>・動的ルートの params が Promise になっていた（await が要る）</a:t>
+            </a:r>
+          </a:p>
+          <a:p>
+            <a:r>
+              <a:t>・記事のまま書いていたら動かないコードになっていた</a:t>
+            </a:r>
+          </a:p>
+          <a:p/>
+          <a:p>
+            <a:r>
+              <a:t>◆ 結論</a:t>
+            </a:r>
+          </a:p>
+          <a:p>
+            <a:r>
+              <a:t>・バージョンを確認して、公式を一次情報にする。記事は補助</a:t>
+            </a:r>
+          </a:p>
+          <a:p>
+            <a:r>
+              <a:t>・これは Next.js に限らず、他のライブラリでも同じだと思う</a:t>
+            </a:r>
+          </a:p>
+          <a:p/>
         </p:txBody>
       </p:sp>
       <p:sp>
